--- a/docs/RetailVision_Project_Presentation.pptx
+++ b/docs/RetailVision_Project_Presentation.pptx
@@ -12581,7 +12581,7 @@
                   <a:schemeClr val="tx2"/>
                 </a:solidFill>
               </a:rPr>
-              <a:t>Needs days of history; under 9 hours it is a cosmetic baseline.</a:t>
+              <a:t>Needs days of history; under 9 hours it shows the flat average, and with no data, nothing.</a:t>
             </a:r>
             <a:endParaRPr lang="en-US" sz="1400" dirty="0"/>
           </a:p>
